--- a/HE.pptx
+++ b/HE.pptx
@@ -21123,7 +21123,7 @@
           <a:p>
             <a:r>
               <a:rPr lang="hu-HU" dirty="0"/>
-              <a:t>Multinet: </a:t>
+              <a:t>multinet: </a:t>
             </a:r>
             <a:r>
               <a:rPr lang="hu-HU" dirty="0">
